--- a/MECH191_metallurgy/slideDecks/pptx/MECH191_Week8_Lecture.pptx
+++ b/MECH191_metallurgy/slideDecks/pptx/MECH191_Week8_Lecture.pptx
@@ -13154,7 +13154,7 @@
         </p:spPr>
         <p:txBody>
           <a:bodyPr wrap="none" lIns="0" rIns="0" tIns="0" bIns="0">
-            <a:spAutoFit/>
+            <a:noAutofit/>
           </a:bodyPr>
           <a:lstStyle/>
           <a:p>
@@ -13165,7 +13165,7 @@
                 </a:solidFill>
                 <a:latin typeface="Calibri"/>
               </a:rPr>
-              <a:t>Metallography Lab — Module 7</a:t>
+              <a:t>Alloy Research Portfolio — Module 7</a:t>
             </a:r>
           </a:p>
         </p:txBody>
@@ -13188,7 +13188,7 @@
         </p:spPr>
         <p:txBody>
           <a:bodyPr wrap="none" lIns="0" rIns="0" tIns="0" bIns="0">
-            <a:spAutoFit/>
+            <a:noAutofit/>
           </a:bodyPr>
           <a:lstStyle/>
           <a:p>
@@ -13199,7 +13199,7 @@
                 </a:solidFill>
                 <a:latin typeface="Calibri"/>
               </a:rPr>
-              <a:t>EXAMET-5-R-600-HD  ·  50–500×</a:t>
+              <a:t>No Microscope Required</a:t>
             </a:r>
           </a:p>
         </p:txBody>
@@ -13324,7 +13324,7 @@
         </p:spPr>
         <p:txBody>
           <a:bodyPr wrap="none" lIns="0" rIns="0" tIns="0" bIns="0">
-            <a:spAutoFit/>
+            <a:noAutofit/>
           </a:bodyPr>
           <a:lstStyle/>
           <a:p>
@@ -13335,7 +13335,7 @@
                 </a:solidFill>
                 <a:latin typeface="Calibri"/>
               </a:rPr>
-              <a:t>Identify surface discontinuities at 50×–100×. Distinguish an engineered </a:t>
+              <a:t>Research 1018 steel, 360 brass, and Ti-6Al-4V: typical inclusions,</a:t>
             </a:r>
           </a:p>
         </p:txBody>
@@ -13358,7 +13358,7 @@
         </p:spPr>
         <p:txBody>
           <a:bodyPr wrap="none" lIns="0" rIns="0" tIns="0" bIns="0">
-            <a:spAutoFit/>
+            <a:noAutofit/>
           </a:bodyPr>
           <a:lstStyle/>
           <a:p>
@@ -13369,7 +13369,7 @@
                 </a:solidFill>
                 <a:latin typeface="Calibri"/>
               </a:rPr>
-              <a:t>particle (L) from a true defect.</a:t>
+              <a:t>intentional particles, and why NDT replaces sectioning here.</a:t>
             </a:r>
           </a:p>
         </p:txBody>
@@ -13426,7 +13426,7 @@
         </p:spPr>
         <p:txBody>
           <a:bodyPr wrap="none" lIns="0" rIns="0" tIns="0" bIns="0">
-            <a:spAutoFit/>
+            <a:noAutofit/>
           </a:bodyPr>
           <a:lstStyle/>
           <a:p>
@@ -13437,7 +13437,7 @@
                 </a:solidFill>
                 <a:latin typeface="Calibri"/>
               </a:rPr>
-              <a:t>1  Observe — complete feature table</a:t>
+              <a:t>1  Research — record data &amp; sources</a:t>
             </a:r>
           </a:p>
         </p:txBody>
@@ -13460,7 +13460,7 @@
         </p:spPr>
         <p:txBody>
           <a:bodyPr wrap="none" lIns="0" rIns="0" tIns="0" bIns="0">
-            <a:spAutoFit/>
+            <a:noAutofit/>
           </a:bodyPr>
           <a:lstStyle/>
           <a:p>
@@ -13471,7 +13471,7 @@
                 </a:solidFill>
                 <a:latin typeface="Calibri"/>
               </a:rPr>
-              <a:t>2  Sketch — label magnification &amp; specimen</a:t>
+              <a:t>2  Answer — short-answer questions</a:t>
             </a:r>
           </a:p>
         </p:txBody>
@@ -13494,7 +13494,7 @@
         </p:spPr>
         <p:txBody>
           <a:bodyPr wrap="none" lIns="0" rIns="0" tIns="0" bIns="0">
-            <a:spAutoFit/>
+            <a:noAutofit/>
           </a:bodyPr>
           <a:lstStyle/>
           <a:p>
@@ -13505,7 +13505,7 @@
                 </a:solidFill>
                 <a:latin typeface="Calibri"/>
               </a:rPr>
-              <a:t>3  Answer — 4 short questions</a:t>
+              <a:t>3  Apply — critical-thinking &amp; equations</a:t>
             </a:r>
           </a:p>
         </p:txBody>
@@ -13528,7 +13528,7 @@
         </p:spPr>
         <p:txBody>
           <a:bodyPr wrap="none" lIns="0" rIns="0" tIns="0" bIns="0">
-            <a:spAutoFit/>
+            <a:noAutofit/>
           </a:bodyPr>
           <a:lstStyle/>
           <a:p>
@@ -13539,7 +13539,7 @@
                 </a:solidFill>
                 <a:latin typeface="Calibri"/>
               </a:rPr>
-              <a:t>Specimens to Check Out</a:t>
+              <a:t>Alloys of Record</a:t>
             </a:r>
           </a:p>
         </p:txBody>
@@ -13562,7 +13562,7 @@
         </p:spPr>
         <p:txBody>
           <a:bodyPr wrap="none" lIns="0" rIns="0" tIns="0" bIns="0">
-            <a:spAutoFit/>
+            <a:noAutofit/>
           </a:bodyPr>
           <a:lstStyle/>
           <a:p>
@@ -13573,7 +13573,7 @@
                 </a:solidFill>
                 <a:latin typeface="Calibri"/>
               </a:rPr>
-              <a:t>· Specimen A — 1018 steel</a:t>
+              <a:t>· Alloy A — 1018 steel</a:t>
             </a:r>
           </a:p>
         </p:txBody>
@@ -13596,7 +13596,7 @@
         </p:spPr>
         <p:txBody>
           <a:bodyPr wrap="none" lIns="0" rIns="0" tIns="0" bIns="0">
-            <a:spAutoFit/>
+            <a:noAutofit/>
           </a:bodyPr>
           <a:lstStyle/>
           <a:p>
@@ -13607,7 +13607,7 @@
                 </a:solidFill>
                 <a:latin typeface="Calibri"/>
               </a:rPr>
-              <a:t>· Specimen L — 360 leaded brass</a:t>
+              <a:t>· Alloy L — 360 leaded brass</a:t>
             </a:r>
           </a:p>
         </p:txBody>
@@ -13630,7 +13630,7 @@
         </p:spPr>
         <p:txBody>
           <a:bodyPr wrap="none" lIns="0" rIns="0" tIns="0" bIns="0">
-            <a:spAutoFit/>
+            <a:noAutofit/>
           </a:bodyPr>
           <a:lstStyle/>
           <a:p>
@@ -13641,7 +13641,7 @@
                 </a:solidFill>
                 <a:latin typeface="Calibri"/>
               </a:rPr>
-              <a:t>· Specimen P — Ti-6Al-4V titanium</a:t>
+              <a:t>· Alloy P — Ti-6Al-4V titanium</a:t>
             </a:r>
           </a:p>
         </p:txBody>
@@ -13664,7 +13664,7 @@
         </p:spPr>
         <p:txBody>
           <a:bodyPr wrap="none" lIns="0" rIns="0" tIns="0" bIns="0">
-            <a:spAutoFit/>
+            <a:noAutofit/>
           </a:bodyPr>
           <a:lstStyle/>
           <a:p>
@@ -13675,7 +13675,7 @@
                 </a:solidFill>
                 <a:latin typeface="Calibri"/>
               </a:rPr>
-              <a:t>How to check out the kit:</a:t>
+              <a:t>How to Complete This Module:</a:t>
             </a:r>
           </a:p>
         </p:txBody>
@@ -13698,7 +13698,7 @@
         </p:spPr>
         <p:txBody>
           <a:bodyPr wrap="none" lIns="0" rIns="0" tIns="0" bIns="0">
-            <a:spAutoFit/>
+            <a:noAutofit/>
           </a:bodyPr>
           <a:lstStyle/>
           <a:p>
@@ -13709,7 +13709,7 @@
                 </a:solidFill>
                 <a:latin typeface="Calibri"/>
               </a:rPr>
-              <a:t>1  See instructor after class today</a:t>
+              <a:t>1  Research the alloy(s) using credible sources</a:t>
             </a:r>
           </a:p>
         </p:txBody>
@@ -13732,7 +13732,7 @@
         </p:spPr>
         <p:txBody>
           <a:bodyPr wrap="none" lIns="0" rIns="0" tIns="0" bIns="0">
-            <a:spAutoFit/>
+            <a:noAutofit/>
           </a:bodyPr>
           <a:lstStyle/>
           <a:p>
@@ -13743,7 +13743,7 @@
                 </a:solidFill>
                 <a:latin typeface="Calibri"/>
               </a:rPr>
-              <a:t>2  Sign out the specimen tray</a:t>
+              <a:t>2  Record data with a source citation</a:t>
             </a:r>
           </a:p>
         </p:txBody>
@@ -13766,7 +13766,7 @@
         </p:spPr>
         <p:txBody>
           <a:bodyPr wrap="none" lIns="0" rIns="0" tIns="0" bIns="0">
-            <a:spAutoFit/>
+            <a:noAutofit/>
           </a:bodyPr>
           <a:lstStyle/>
           <a:p>
@@ -13777,7 +13777,7 @@
                 </a:solidFill>
                 <a:latin typeface="Calibri"/>
               </a:rPr>
-              <a:t>3  Use the EXAMET-5 at your convenience</a:t>
+              <a:t>3  Answer the short-answer questions</a:t>
             </a:r>
           </a:p>
         </p:txBody>
@@ -13800,7 +13800,7 @@
         </p:spPr>
         <p:txBody>
           <a:bodyPr wrap="none" lIns="0" rIns="0" tIns="0" bIns="0">
-            <a:spAutoFit/>
+            <a:noAutofit/>
           </a:bodyPr>
           <a:lstStyle/>
           <a:p>
@@ -13811,7 +13811,7 @@
                 </a:solidFill>
                 <a:latin typeface="Calibri"/>
               </a:rPr>
-              <a:t>4  Return kit before leaving class</a:t>
+              <a:t>4  Answer the critical-thinking questions</a:t>
             </a:r>
           </a:p>
         </p:txBody>
@@ -13834,7 +13834,7 @@
         </p:spPr>
         <p:txBody>
           <a:bodyPr wrap="none" lIns="0" rIns="0" tIns="0" bIns="0">
-            <a:spAutoFit/>
+            <a:noAutofit/>
           </a:bodyPr>
           <a:lstStyle/>
           <a:p>
@@ -13845,7 +13845,7 @@
                 </a:solidFill>
                 <a:latin typeface="Calibri"/>
               </a:rPr>
-              <a:t>5  Submit completed module with your portfolio</a:t>
+              <a:t>5  Keep the module with your portfolio</a:t>
             </a:r>
           </a:p>
         </p:txBody>
